--- a/docs/演示/业务态势.pptx
+++ b/docs/演示/业务态势.pptx
@@ -6,6 +6,10 @@
   </p:sldMasterIdLst>
   <p:sldIdLst>
     <p:sldId id="256" r:id="rId7"/>
+    <p:sldId id="257" r:id="rId8"/>
+    <p:sldId id="258" r:id="rId9"/>
+    <p:sldId id="259" r:id="rId10"/>
+    <p:sldId id="260" r:id="rId11"/>
   </p:sldIdLst>
   <p:sldSz cx="9144000" cy="6858000" type="screen4x3"/>
   <p:notesSz cx="6858000" cy="9144000"/>
@@ -3450,6 +3454,674 @@
                 <a:latin typeface="Microsoft YaHei"/>
               </a:rPr>
               <a:t>数据为模拟演示场景，实时滚动更新：签阅收到 68 份、处理率 79.4%、待处理 11 份、异常退回 3 份。</a:t>
+            </a:r>
+          </a:p>
+        </p:txBody>
+      </p:sp>
+    </p:spTree>
+  </p:cSld>
+  <p:clrMapOvr>
+    <a:masterClrMapping/>
+  </p:clrMapOvr>
+</p:sld>
+</file>
+
+<file path=ppt/slides/slide2.xml><?xml version="1.0" encoding="utf-8"?>
+<p:sld xmlns:a="http://schemas.openxmlformats.org/drawingml/2006/main" xmlns:p="http://schemas.openxmlformats.org/presentationml/2006/main" xmlns:r="http://schemas.openxmlformats.org/officeDocument/2006/relationships">
+  <p:cSld>
+    <p:spTree>
+      <p:nvGrpSpPr>
+        <p:cNvPr id="1" name=""/>
+        <p:cNvGrpSpPr/>
+        <p:nvPr/>
+      </p:nvGrpSpPr>
+      <p:grpSpPr/>
+      <p:sp>
+        <p:nvSpPr>
+          <p:cNvPr id="2" name="Title 1"/>
+          <p:cNvSpPr>
+            <a:spLocks noGrp="1"/>
+          </p:cNvSpPr>
+          <p:nvPr>
+            <p:ph type="title"/>
+          </p:nvPr>
+        </p:nvSpPr>
+        <p:spPr/>
+        <p:txBody>
+          <a:bodyPr/>
+          <a:lstStyle/>
+          <a:p>
+            <a:pPr>
+              <a:defRPr sz="2700" b="1">
+                <a:solidFill>
+                  <a:srgbClr val="1F4E79"/>
+                </a:solidFill>
+                <a:latin typeface="Microsoft YaHei"/>
+              </a:defRPr>
+            </a:pPr>
+            <a:r>
+              <a:t>业务态势的业务价值</a:t>
+            </a:r>
+          </a:p>
+        </p:txBody>
+      </p:sp>
+      <p:sp>
+        <p:nvSpPr>
+          <p:cNvPr id="3" name="Content Placeholder 2"/>
+          <p:cNvSpPr>
+            <a:spLocks noGrp="1"/>
+          </p:cNvSpPr>
+          <p:nvPr>
+            <p:ph idx="1"/>
+          </p:nvPr>
+        </p:nvSpPr>
+        <p:spPr/>
+        <p:txBody>
+          <a:bodyPr/>
+          <a:lstStyle/>
+          <a:p>
+            <a:pPr>
+              <a:defRPr sz="1600" b="1">
+                <a:solidFill>
+                  <a:srgbClr val="444444"/>
+                </a:solidFill>
+                <a:latin typeface="Microsoft YaHei"/>
+              </a:defRPr>
+            </a:pPr>
+            <a:r>
+              <a:t>围绕密信、签阅和通信链路，呈现业务运行状态与安全影响</a:t>
+            </a:r>
+          </a:p>
+          <a:p>
+            <a:pPr>
+              <a:defRPr sz="1700" b="1">
+                <a:solidFill>
+                  <a:srgbClr val="1F4E79"/>
+                </a:solidFill>
+                <a:latin typeface="Microsoft YaHei"/>
+              </a:defRPr>
+            </a:pPr>
+            <a:r>
+              <a:t>看运行</a:t>
+            </a:r>
+          </a:p>
+          <a:p>
+            <a:pPr lvl="1">
+              <a:defRPr sz="1400">
+                <a:solidFill>
+                  <a:srgbClr val="373737"/>
+                </a:solidFill>
+                <a:latin typeface="Microsoft YaHei"/>
+              </a:defRPr>
+            </a:pPr>
+            <a:r>
+              <a:t>当前有多少用户在线、密信收发是否活跃、签阅文件是否积压、区域链路是否可用。</a:t>
+            </a:r>
+          </a:p>
+          <a:p>
+            <a:pPr>
+              <a:defRPr sz="1700" b="1">
+                <a:solidFill>
+                  <a:srgbClr val="1F4E79"/>
+                </a:solidFill>
+                <a:latin typeface="Microsoft YaHei"/>
+              </a:defRPr>
+            </a:pPr>
+            <a:r>
+              <a:t>看风险</a:t>
+            </a:r>
+          </a:p>
+          <a:p>
+            <a:pPr lvl="1">
+              <a:defRPr sz="1400">
+                <a:solidFill>
+                  <a:srgbClr val="373737"/>
+                </a:solidFill>
+                <a:latin typeface="Microsoft YaHei"/>
+              </a:defRPr>
+            </a:pPr>
+            <a:r>
+              <a:t>将零信任认证失败、异常文件、证书/密钥异常与具体人员、区域、业务对象关联。</a:t>
+            </a:r>
+          </a:p>
+          <a:p>
+            <a:pPr>
+              <a:defRPr sz="1700" b="1">
+                <a:solidFill>
+                  <a:srgbClr val="1F4E79"/>
+                </a:solidFill>
+                <a:latin typeface="Microsoft YaHei"/>
+              </a:defRPr>
+            </a:pPr>
+            <a:r>
+              <a:t>看处置</a:t>
+            </a:r>
+          </a:p>
+          <a:p>
+            <a:pPr lvl="1">
+              <a:defRPr sz="1400">
+                <a:solidFill>
+                  <a:srgbClr val="373737"/>
+                </a:solidFill>
+                <a:latin typeface="Microsoft YaHei"/>
+              </a:defRPr>
+            </a:pPr>
+            <a:r>
+              <a:t>从事件发现到策略阻断、业务确认和后续复盘，形成可讲清、可追踪、可验证的演示链路。</a:t>
+            </a:r>
+          </a:p>
+        </p:txBody>
+      </p:sp>
+    </p:spTree>
+  </p:cSld>
+  <p:clrMapOvr>
+    <a:masterClrMapping/>
+  </p:clrMapOvr>
+</p:sld>
+</file>
+
+<file path=ppt/slides/slide3.xml><?xml version="1.0" encoding="utf-8"?>
+<p:sld xmlns:a="http://schemas.openxmlformats.org/drawingml/2006/main" xmlns:p="http://schemas.openxmlformats.org/presentationml/2006/main" xmlns:r="http://schemas.openxmlformats.org/officeDocument/2006/relationships">
+  <p:cSld>
+    <p:spTree>
+      <p:nvGrpSpPr>
+        <p:cNvPr id="1" name=""/>
+        <p:cNvGrpSpPr/>
+        <p:nvPr/>
+      </p:nvGrpSpPr>
+      <p:grpSpPr/>
+      <p:sp>
+        <p:nvSpPr>
+          <p:cNvPr id="2" name="Title 1"/>
+          <p:cNvSpPr>
+            <a:spLocks noGrp="1"/>
+          </p:cNvSpPr>
+          <p:nvPr>
+            <p:ph type="title"/>
+          </p:nvPr>
+        </p:nvSpPr>
+        <p:spPr/>
+        <p:txBody>
+          <a:bodyPr/>
+          <a:lstStyle/>
+          <a:p>
+            <a:pPr>
+              <a:defRPr sz="2700" b="1">
+                <a:solidFill>
+                  <a:srgbClr val="1F4E79"/>
+                </a:solidFill>
+                <a:latin typeface="Microsoft YaHei"/>
+              </a:defRPr>
+            </a:pPr>
+            <a:r>
+              <a:t>业务态势的实现方法</a:t>
+            </a:r>
+          </a:p>
+        </p:txBody>
+      </p:sp>
+      <p:sp>
+        <p:nvSpPr>
+          <p:cNvPr id="3" name="Content Placeholder 2"/>
+          <p:cNvSpPr>
+            <a:spLocks noGrp="1"/>
+          </p:cNvSpPr>
+          <p:nvPr>
+            <p:ph idx="1"/>
+          </p:nvPr>
+        </p:nvSpPr>
+        <p:spPr/>
+        <p:txBody>
+          <a:bodyPr/>
+          <a:lstStyle/>
+          <a:p>
+            <a:pPr>
+              <a:defRPr sz="1600" b="1">
+                <a:solidFill>
+                  <a:srgbClr val="444444"/>
+                </a:solidFill>
+                <a:latin typeface="Microsoft YaHei"/>
+              </a:defRPr>
+            </a:pPr>
+            <a:r>
+              <a:t>业务明细驱动汇总指标，安全事件驱动业务联动</a:t>
+            </a:r>
+          </a:p>
+          <a:p>
+            <a:pPr>
+              <a:defRPr sz="1700" b="1">
+                <a:solidFill>
+                  <a:srgbClr val="1F4E79"/>
+                </a:solidFill>
+                <a:latin typeface="Microsoft YaHei"/>
+              </a:defRPr>
+            </a:pPr>
+            <a:r>
+              <a:t>密信</a:t>
+            </a:r>
+          </a:p>
+          <a:p>
+            <a:pPr lvl="1">
+              <a:defRPr sz="1400">
+                <a:solidFill>
+                  <a:srgbClr val="373737"/>
+                </a:solidFill>
+                <a:latin typeface="Microsoft YaHei"/>
+              </a:defRPr>
+            </a:pPr>
+            <a:r>
+              <a:t>以人员和区域为主键汇总登录、消息、文件和收发对象，支持用户排行、部门排行和专题下钻。</a:t>
+            </a:r>
+          </a:p>
+          <a:p>
+            <a:pPr>
+              <a:defRPr sz="1700" b="1">
+                <a:solidFill>
+                  <a:srgbClr val="1F4E79"/>
+                </a:solidFill>
+                <a:latin typeface="Microsoft YaHei"/>
+              </a:defRPr>
+            </a:pPr>
+            <a:r>
+              <a:t>签阅</a:t>
+            </a:r>
+          </a:p>
+          <a:p>
+            <a:pPr lvl="1">
+              <a:defRPr sz="1400">
+                <a:solidFill>
+                  <a:srgbClr val="373737"/>
+                </a:solidFill>
+                <a:latin typeface="Microsoft YaHei"/>
+              </a:defRPr>
+            </a:pPr>
+            <a:r>
+              <a:t>以文件流转状态闭合收到、已处理、待处理、异常退回四类指标，保证统计可解释。</a:t>
+            </a:r>
+          </a:p>
+          <a:p>
+            <a:pPr>
+              <a:defRPr sz="1700" b="1">
+                <a:solidFill>
+                  <a:srgbClr val="1F4E79"/>
+                </a:solidFill>
+                <a:latin typeface="Microsoft YaHei"/>
+              </a:defRPr>
+            </a:pPr>
+            <a:r>
+              <a:t>智能联动</a:t>
+            </a:r>
+          </a:p>
+          <a:p>
+            <a:pPr lvl="1">
+              <a:defRPr sz="1400">
+                <a:solidFill>
+                  <a:srgbClr val="373737"/>
+                </a:solidFill>
+                <a:latin typeface="Microsoft YaHei"/>
+              </a:defRPr>
+            </a:pPr>
+            <a:r>
+              <a:t>零信任认证失败作为安全事件进入态势后，更新事件流、北京点位信号和人员详情；密信/签阅操作则更新业务活动与对应指标。</a:t>
+            </a:r>
+          </a:p>
+        </p:txBody>
+      </p:sp>
+    </p:spTree>
+  </p:cSld>
+  <p:clrMapOvr>
+    <a:masterClrMapping/>
+  </p:clrMapOvr>
+</p:sld>
+</file>
+
+<file path=ppt/slides/slide4.xml><?xml version="1.0" encoding="utf-8"?>
+<p:sld xmlns:a="http://schemas.openxmlformats.org/drawingml/2006/main" xmlns:p="http://schemas.openxmlformats.org/presentationml/2006/main" xmlns:r="http://schemas.openxmlformats.org/officeDocument/2006/relationships">
+  <p:cSld>
+    <p:spTree>
+      <p:nvGrpSpPr>
+        <p:cNvPr id="1" name=""/>
+        <p:cNvGrpSpPr/>
+        <p:nvPr/>
+      </p:nvGrpSpPr>
+      <p:grpSpPr/>
+      <p:sp>
+        <p:nvSpPr>
+          <p:cNvPr id="2" name="Title 1"/>
+          <p:cNvSpPr>
+            <a:spLocks noGrp="1"/>
+          </p:cNvSpPr>
+          <p:nvPr>
+            <p:ph type="title"/>
+          </p:nvPr>
+        </p:nvSpPr>
+        <p:spPr/>
+        <p:txBody>
+          <a:bodyPr/>
+          <a:lstStyle/>
+          <a:p>
+            <a:pPr>
+              <a:defRPr sz="2700" b="1">
+                <a:solidFill>
+                  <a:srgbClr val="1F4E79"/>
+                </a:solidFill>
+                <a:latin typeface="Microsoft YaHei"/>
+              </a:defRPr>
+            </a:pPr>
+            <a:r>
+              <a:t>现场演示脚本与页面反馈</a:t>
+            </a:r>
+          </a:p>
+        </p:txBody>
+      </p:sp>
+      <p:sp>
+        <p:nvSpPr>
+          <p:cNvPr id="3" name="Content Placeholder 2"/>
+          <p:cNvSpPr>
+            <a:spLocks noGrp="1"/>
+          </p:cNvSpPr>
+          <p:nvPr>
+            <p:ph idx="1"/>
+          </p:nvPr>
+        </p:nvSpPr>
+        <p:spPr/>
+        <p:txBody>
+          <a:bodyPr/>
+          <a:lstStyle/>
+          <a:p>
+            <a:pPr>
+              <a:defRPr sz="1600" b="1">
+                <a:solidFill>
+                  <a:srgbClr val="444444"/>
+                </a:solidFill>
+                <a:latin typeface="Microsoft YaHei"/>
+              </a:defRPr>
+            </a:pPr>
+            <a:r>
+              <a:t>外部系统操作在态势侧形成可观察的业务结果</a:t>
+            </a:r>
+          </a:p>
+          <a:p>
+            <a:pPr>
+              <a:defRPr sz="1700" b="1">
+                <a:solidFill>
+                  <a:srgbClr val="1F4E79"/>
+                </a:solidFill>
+                <a:latin typeface="Microsoft YaHei"/>
+              </a:defRPr>
+            </a:pPr>
+            <a:r>
+              <a:t>零信任演示</a:t>
+            </a:r>
+          </a:p>
+          <a:p>
+            <a:pPr lvl="1">
+              <a:defRPr sz="1400">
+                <a:solidFill>
+                  <a:srgbClr val="373737"/>
+                </a:solidFill>
+                <a:latin typeface="Microsoft YaHei"/>
+              </a:defRPr>
+            </a:pPr>
+            <a:r>
+              <a:t>模拟连续 5 次密码输入错误，页面显示“零信任密码认证失败”、账号锁定和访问阻断；北京点位出现高危联动标签。</a:t>
+            </a:r>
+          </a:p>
+          <a:p>
+            <a:pPr>
+              <a:defRPr sz="1700" b="1">
+                <a:solidFill>
+                  <a:srgbClr val="1F4E79"/>
+                </a:solidFill>
+                <a:latin typeface="Microsoft YaHei"/>
+              </a:defRPr>
+            </a:pPr>
+            <a:r>
+              <a:t>密信演示</a:t>
+            </a:r>
+          </a:p>
+          <a:p>
+            <a:pPr lvl="1">
+              <a:defRPr sz="1400">
+                <a:solidFill>
+                  <a:srgbClr val="373737"/>
+                </a:solidFill>
+                <a:latin typeface="Microsoft YaHei"/>
+              </a:defRPr>
+            </a:pPr>
+            <a:r>
+              <a:t>模拟北京发送一条密信，消息总量、北京业务活动、密信专题趋势和收发排行即时增加。</a:t>
+            </a:r>
+          </a:p>
+          <a:p>
+            <a:pPr>
+              <a:defRPr sz="1700" b="1">
+                <a:solidFill>
+                  <a:srgbClr val="1F4E79"/>
+                </a:solidFill>
+                <a:latin typeface="Microsoft YaHei"/>
+              </a:defRPr>
+            </a:pPr>
+            <a:r>
+              <a:t>签约/签阅演示</a:t>
+            </a:r>
+          </a:p>
+          <a:p>
+            <a:pPr lvl="1">
+              <a:defRPr sz="1400">
+                <a:solidFill>
+                  <a:srgbClr val="373737"/>
+                </a:solidFill>
+                <a:latin typeface="Microsoft YaHei"/>
+              </a:defRPr>
+            </a:pPr>
+            <a:r>
+              <a:t>模拟北京完成一份签阅文件，收到数与已处理数同步增加，处理率与活动记录即时更新。</a:t>
+            </a:r>
+          </a:p>
+          <a:p>
+            <a:pPr>
+              <a:defRPr sz="1700" b="1">
+                <a:solidFill>
+                  <a:srgbClr val="1F4E79"/>
+                </a:solidFill>
+                <a:latin typeface="Microsoft YaHei"/>
+              </a:defRPr>
+            </a:pPr>
+            <a:r>
+              <a:t>现场控制</a:t>
+            </a:r>
+          </a:p>
+          <a:p>
+            <a:pPr lvl="1">
+              <a:defRPr sz="1400">
+                <a:solidFill>
+                  <a:srgbClr val="373737"/>
+                </a:solidFill>
+                <a:latin typeface="Microsoft YaHei"/>
+              </a:defRPr>
+            </a:pPr>
+            <a:r>
+              <a:t>使用顶栏“现场演示”控制台或“一键串演”，不依赖接口调试；页面明确为模拟数据，后续可替换为真实接口。</a:t>
+            </a:r>
+          </a:p>
+        </p:txBody>
+      </p:sp>
+    </p:spTree>
+  </p:cSld>
+  <p:clrMapOvr>
+    <a:masterClrMapping/>
+  </p:clrMapOvr>
+</p:sld>
+</file>
+
+<file path=ppt/slides/slide5.xml><?xml version="1.0" encoding="utf-8"?>
+<p:sld xmlns:a="http://schemas.openxmlformats.org/drawingml/2006/main" xmlns:p="http://schemas.openxmlformats.org/presentationml/2006/main" xmlns:r="http://schemas.openxmlformats.org/officeDocument/2006/relationships">
+  <p:cSld>
+    <p:spTree>
+      <p:nvGrpSpPr>
+        <p:cNvPr id="1" name=""/>
+        <p:cNvGrpSpPr/>
+        <p:nvPr/>
+      </p:nvGrpSpPr>
+      <p:grpSpPr/>
+      <p:sp>
+        <p:nvSpPr>
+          <p:cNvPr id="2" name="Title 1"/>
+          <p:cNvSpPr>
+            <a:spLocks noGrp="1"/>
+          </p:cNvSpPr>
+          <p:nvPr>
+            <p:ph type="title"/>
+          </p:nvPr>
+        </p:nvSpPr>
+        <p:spPr/>
+        <p:txBody>
+          <a:bodyPr/>
+          <a:lstStyle/>
+          <a:p>
+            <a:pPr>
+              <a:defRPr sz="2700" b="1">
+                <a:solidFill>
+                  <a:srgbClr val="1F4E79"/>
+                </a:solidFill>
+                <a:latin typeface="Microsoft YaHei"/>
+              </a:defRPr>
+            </a:pPr>
+            <a:r>
+              <a:t>从模拟演示到真实业务接入</a:t>
+            </a:r>
+          </a:p>
+        </p:txBody>
+      </p:sp>
+      <p:sp>
+        <p:nvSpPr>
+          <p:cNvPr id="3" name="Content Placeholder 2"/>
+          <p:cNvSpPr>
+            <a:spLocks noGrp="1"/>
+          </p:cNvSpPr>
+          <p:nvPr>
+            <p:ph idx="1"/>
+          </p:nvPr>
+        </p:nvSpPr>
+        <p:spPr/>
+        <p:txBody>
+          <a:bodyPr/>
+          <a:lstStyle/>
+          <a:p>
+            <a:pPr>
+              <a:defRPr sz="1600" b="1">
+                <a:solidFill>
+                  <a:srgbClr val="444444"/>
+                </a:solidFill>
+                <a:latin typeface="Microsoft YaHei"/>
+              </a:defRPr>
+            </a:pPr>
+            <a:r>
+              <a:t>保持页面领域模型不变，按优先级替换数据提供层</a:t>
+            </a:r>
+          </a:p>
+          <a:p>
+            <a:pPr>
+              <a:defRPr sz="1700" b="1">
+                <a:solidFill>
+                  <a:srgbClr val="1F4E79"/>
+                </a:solidFill>
+                <a:latin typeface="Microsoft YaHei"/>
+              </a:defRPr>
+            </a:pPr>
+            <a:r>
+              <a:t>第一优先级</a:t>
+            </a:r>
+          </a:p>
+          <a:p>
+            <a:pPr lvl="1">
+              <a:defRPr sz="1400">
+                <a:solidFill>
+                  <a:srgbClr val="373737"/>
+                </a:solidFill>
+                <a:latin typeface="Microsoft YaHei"/>
+              </a:defRPr>
+            </a:pPr>
+            <a:r>
+              <a:t>接入零信任登录失败/锁定、密信消息与文件收发、签阅文件状态变化，完成核心演示闭环。</a:t>
+            </a:r>
+          </a:p>
+          <a:p>
+            <a:pPr>
+              <a:defRPr sz="1700" b="1">
+                <a:solidFill>
+                  <a:srgbClr val="1F4E79"/>
+                </a:solidFill>
+                <a:latin typeface="Microsoft YaHei"/>
+              </a:defRPr>
+            </a:pPr>
+            <a:r>
+              <a:t>第二优先级</a:t>
+            </a:r>
+          </a:p>
+          <a:p>
+            <a:pPr lvl="1">
+              <a:defRPr sz="1400">
+                <a:solidFill>
+                  <a:srgbClr val="373737"/>
+                </a:solidFill>
+                <a:latin typeface="Microsoft YaHei"/>
+              </a:defRPr>
+            </a:pPr>
+            <a:r>
+              <a:t>接入人员、组织、终端和区域主数据，统一关联标识并消除重复统计。</a:t>
+            </a:r>
+          </a:p>
+          <a:p>
+            <a:pPr>
+              <a:defRPr sz="1700" b="1">
+                <a:solidFill>
+                  <a:srgbClr val="1F4E79"/>
+                </a:solidFill>
+                <a:latin typeface="Microsoft YaHei"/>
+              </a:defRPr>
+            </a:pPr>
+            <a:r>
+              <a:t>第三优先级</a:t>
+            </a:r>
+          </a:p>
+          <a:p>
+            <a:pPr lvl="1">
+              <a:defRPr sz="1400">
+                <a:solidFill>
+                  <a:srgbClr val="373737"/>
+                </a:solidFill>
+                <a:latin typeface="Microsoft YaHei"/>
+              </a:defRPr>
+            </a:pPr>
+            <a:r>
+              <a:t>接入历史明细和审计数据，支持趋势分析、风险基线、策略效果评估和事件复盘。</a:t>
+            </a:r>
+          </a:p>
+          <a:p>
+            <a:pPr>
+              <a:defRPr sz="1700" b="1">
+                <a:solidFill>
+                  <a:srgbClr val="1F4E79"/>
+                </a:solidFill>
+                <a:latin typeface="Microsoft YaHei"/>
+              </a:defRPr>
+            </a:pPr>
+            <a:r>
+              <a:t>验收口径</a:t>
+            </a:r>
+          </a:p>
+          <a:p>
+            <a:pPr lvl="1">
+              <a:defRPr sz="1400">
+                <a:solidFill>
+                  <a:srgbClr val="373737"/>
+                </a:solidFill>
+                <a:latin typeface="Microsoft YaHei"/>
+              </a:defRPr>
+            </a:pPr>
+            <a:r>
+              <a:t>接口字段、刷新延迟、事件去重、指标闭合和权限范围形成联调清单，逐项验证后切换生产数据。</a:t>
             </a:r>
           </a:p>
         </p:txBody>
